--- a/_posts/material/nn1.pptx
+++ b/_posts/material/nn1.pptx
@@ -106,6 +106,11 @@
       </a:defRPr>
     </a:lvl9pPr>
   </p:defaultTextStyle>
+  <p:extLst>
+    <p:ext uri="{EFAFB233-063F-42B5-8137-9DF3F51BA10A}">
+      <p15:sldGuideLst xmlns:p15="http://schemas.microsoft.com/office/powerpoint/2012/main"/>
+    </p:ext>
+  </p:extLst>
 </p:presentation>
 </file>
 
@@ -240,7 +245,7 @@
           <a:p>
             <a:fld id="{C95DC803-9DC9-3E49-BE13-F1065B6402CA}" type="datetimeFigureOut">
               <a:rPr lang="de-DE" smtClean="0"/>
-              <a:t>12.07.18</a:t>
+              <a:t>13.07.18</a:t>
             </a:fld>
             <a:endParaRPr lang="de-DE"/>
           </a:p>
@@ -410,7 +415,7 @@
           <a:p>
             <a:fld id="{C95DC803-9DC9-3E49-BE13-F1065B6402CA}" type="datetimeFigureOut">
               <a:rPr lang="de-DE" smtClean="0"/>
-              <a:t>12.07.18</a:t>
+              <a:t>13.07.18</a:t>
             </a:fld>
             <a:endParaRPr lang="de-DE"/>
           </a:p>
@@ -590,7 +595,7 @@
           <a:p>
             <a:fld id="{C95DC803-9DC9-3E49-BE13-F1065B6402CA}" type="datetimeFigureOut">
               <a:rPr lang="de-DE" smtClean="0"/>
-              <a:t>12.07.18</a:t>
+              <a:t>13.07.18</a:t>
             </a:fld>
             <a:endParaRPr lang="de-DE"/>
           </a:p>
@@ -760,7 +765,7 @@
           <a:p>
             <a:fld id="{C95DC803-9DC9-3E49-BE13-F1065B6402CA}" type="datetimeFigureOut">
               <a:rPr lang="de-DE" smtClean="0"/>
-              <a:t>12.07.18</a:t>
+              <a:t>13.07.18</a:t>
             </a:fld>
             <a:endParaRPr lang="de-DE"/>
           </a:p>
@@ -1006,7 +1011,7 @@
           <a:p>
             <a:fld id="{C95DC803-9DC9-3E49-BE13-F1065B6402CA}" type="datetimeFigureOut">
               <a:rPr lang="de-DE" smtClean="0"/>
-              <a:t>12.07.18</a:t>
+              <a:t>13.07.18</a:t>
             </a:fld>
             <a:endParaRPr lang="de-DE"/>
           </a:p>
@@ -1238,7 +1243,7 @@
           <a:p>
             <a:fld id="{C95DC803-9DC9-3E49-BE13-F1065B6402CA}" type="datetimeFigureOut">
               <a:rPr lang="de-DE" smtClean="0"/>
-              <a:t>12.07.18</a:t>
+              <a:t>13.07.18</a:t>
             </a:fld>
             <a:endParaRPr lang="de-DE"/>
           </a:p>
@@ -1605,7 +1610,7 @@
           <a:p>
             <a:fld id="{C95DC803-9DC9-3E49-BE13-F1065B6402CA}" type="datetimeFigureOut">
               <a:rPr lang="de-DE" smtClean="0"/>
-              <a:t>12.07.18</a:t>
+              <a:t>13.07.18</a:t>
             </a:fld>
             <a:endParaRPr lang="de-DE"/>
           </a:p>
@@ -1723,7 +1728,7 @@
           <a:p>
             <a:fld id="{C95DC803-9DC9-3E49-BE13-F1065B6402CA}" type="datetimeFigureOut">
               <a:rPr lang="de-DE" smtClean="0"/>
-              <a:t>12.07.18</a:t>
+              <a:t>13.07.18</a:t>
             </a:fld>
             <a:endParaRPr lang="de-DE"/>
           </a:p>
@@ -1818,7 +1823,7 @@
           <a:p>
             <a:fld id="{C95DC803-9DC9-3E49-BE13-F1065B6402CA}" type="datetimeFigureOut">
               <a:rPr lang="de-DE" smtClean="0"/>
-              <a:t>12.07.18</a:t>
+              <a:t>13.07.18</a:t>
             </a:fld>
             <a:endParaRPr lang="de-DE"/>
           </a:p>
@@ -2095,7 +2100,7 @@
           <a:p>
             <a:fld id="{C95DC803-9DC9-3E49-BE13-F1065B6402CA}" type="datetimeFigureOut">
               <a:rPr lang="de-DE" smtClean="0"/>
-              <a:t>12.07.18</a:t>
+              <a:t>13.07.18</a:t>
             </a:fld>
             <a:endParaRPr lang="de-DE"/>
           </a:p>
@@ -2348,7 +2353,7 @@
           <a:p>
             <a:fld id="{C95DC803-9DC9-3E49-BE13-F1065B6402CA}" type="datetimeFigureOut">
               <a:rPr lang="de-DE" smtClean="0"/>
-              <a:t>12.07.18</a:t>
+              <a:t>13.07.18</a:t>
             </a:fld>
             <a:endParaRPr lang="de-DE"/>
           </a:p>
@@ -2561,7 +2566,7 @@
           <a:p>
             <a:fld id="{C95DC803-9DC9-3E49-BE13-F1065B6402CA}" type="datetimeFigureOut">
               <a:rPr lang="de-DE" smtClean="0"/>
-              <a:t>12.07.18</a:t>
+              <a:t>13.07.18</a:t>
             </a:fld>
             <a:endParaRPr lang="de-DE"/>
           </a:p>
@@ -3657,7 +3662,7 @@
           <a:prstGeom prst="straightConnector1">
             <a:avLst/>
           </a:prstGeom>
-          <a:ln w="76200">
+          <a:ln w="38100">
             <a:solidFill>
               <a:schemeClr val="tx1"/>
             </a:solidFill>
@@ -4328,6 +4333,78 @@
             <a:avLst/>
           </a:prstGeom>
           <a:ln w="28575">
+            <a:solidFill>
+              <a:schemeClr val="tx1"/>
+            </a:solidFill>
+            <a:tailEnd type="triangle"/>
+          </a:ln>
+        </p:spPr>
+        <p:style>
+          <a:lnRef idx="1">
+            <a:schemeClr val="accent1"/>
+          </a:lnRef>
+          <a:fillRef idx="0">
+            <a:schemeClr val="accent1"/>
+          </a:fillRef>
+          <a:effectRef idx="0">
+            <a:schemeClr val="accent1"/>
+          </a:effectRef>
+          <a:fontRef idx="minor">
+            <a:schemeClr val="tx1"/>
+          </a:fontRef>
+        </p:style>
+      </p:cxnSp>
+      <p:cxnSp>
+        <p:nvCxnSpPr>
+          <p:cNvPr id="29" name="Gerade Verbindung mit Pfeil 28"/>
+          <p:cNvCxnSpPr/>
+          <p:nvPr/>
+        </p:nvCxnSpPr>
+        <p:spPr>
+          <a:xfrm>
+            <a:off x="3689375" y="3643778"/>
+            <a:ext cx="783771" cy="774371"/>
+          </a:xfrm>
+          <a:prstGeom prst="straightConnector1">
+            <a:avLst/>
+          </a:prstGeom>
+          <a:ln w="38100">
+            <a:solidFill>
+              <a:schemeClr val="tx1"/>
+            </a:solidFill>
+            <a:tailEnd type="triangle"/>
+          </a:ln>
+        </p:spPr>
+        <p:style>
+          <a:lnRef idx="1">
+            <a:schemeClr val="accent1"/>
+          </a:lnRef>
+          <a:fillRef idx="0">
+            <a:schemeClr val="accent1"/>
+          </a:fillRef>
+          <a:effectRef idx="0">
+            <a:schemeClr val="accent1"/>
+          </a:effectRef>
+          <a:fontRef idx="minor">
+            <a:schemeClr val="tx1"/>
+          </a:fontRef>
+        </p:style>
+      </p:cxnSp>
+      <p:cxnSp>
+        <p:nvCxnSpPr>
+          <p:cNvPr id="30" name="Gerade Verbindung mit Pfeil 29"/>
+          <p:cNvCxnSpPr/>
+          <p:nvPr/>
+        </p:nvCxnSpPr>
+        <p:spPr>
+          <a:xfrm flipV="1">
+            <a:off x="3692591" y="2869407"/>
+            <a:ext cx="783771" cy="774371"/>
+          </a:xfrm>
+          <a:prstGeom prst="straightConnector1">
+            <a:avLst/>
+          </a:prstGeom>
+          <a:ln w="38100">
             <a:solidFill>
               <a:schemeClr val="tx1"/>
             </a:solidFill>
@@ -4443,42 +4520,6 @@
       </p:sp>
       <p:cxnSp>
         <p:nvCxnSpPr>
-          <p:cNvPr id="7" name="Gerade Verbindung mit Pfeil 6"/>
-          <p:cNvCxnSpPr/>
-          <p:nvPr/>
-        </p:nvCxnSpPr>
-        <p:spPr>
-          <a:xfrm>
-            <a:off x="2441343" y="1362306"/>
-            <a:ext cx="783771" cy="0"/>
-          </a:xfrm>
-          <a:prstGeom prst="straightConnector1">
-            <a:avLst/>
-          </a:prstGeom>
-          <a:ln w="76200">
-            <a:solidFill>
-              <a:schemeClr val="tx1"/>
-            </a:solidFill>
-            <a:tailEnd type="triangle"/>
-          </a:ln>
-        </p:spPr>
-        <p:style>
-          <a:lnRef idx="1">
-            <a:schemeClr val="accent1"/>
-          </a:lnRef>
-          <a:fillRef idx="0">
-            <a:schemeClr val="accent1"/>
-          </a:fillRef>
-          <a:effectRef idx="0">
-            <a:schemeClr val="accent1"/>
-          </a:effectRef>
-          <a:fontRef idx="minor">
-            <a:schemeClr val="tx1"/>
-          </a:fontRef>
-        </p:style>
-      </p:cxnSp>
-      <p:cxnSp>
-        <p:nvCxnSpPr>
           <p:cNvPr id="8" name="Gerade Verbindung mit Pfeil 7"/>
           <p:cNvCxnSpPr/>
           <p:nvPr/>
@@ -4950,14 +4991,6 @@
               </a:rPr>
               <a:t>F()</a:t>
             </a:r>
-            <a:endParaRPr lang="de-DE" dirty="0">
-              <a:solidFill>
-                <a:prstClr val="black"/>
-              </a:solidFill>
-              <a:latin typeface="Lucida Sans Unicode" charset="0"/>
-              <a:ea typeface="Lucida Sans Unicode" charset="0"/>
-              <a:cs typeface="Lucida Sans Unicode" charset="0"/>
-            </a:endParaRPr>
           </a:p>
         </p:txBody>
       </p:sp>
@@ -5012,14 +5045,6 @@
               </a:rPr>
               <a:t>F()</a:t>
             </a:r>
-            <a:endParaRPr lang="de-DE" dirty="0">
-              <a:solidFill>
-                <a:prstClr val="black"/>
-              </a:solidFill>
-              <a:latin typeface="Lucida Sans Unicode" charset="0"/>
-              <a:ea typeface="Lucida Sans Unicode" charset="0"/>
-              <a:cs typeface="Lucida Sans Unicode" charset="0"/>
-            </a:endParaRPr>
           </a:p>
         </p:txBody>
       </p:sp>
@@ -5074,14 +5099,6 @@
               </a:rPr>
               <a:t>F()</a:t>
             </a:r>
-            <a:endParaRPr lang="de-DE" dirty="0">
-              <a:solidFill>
-                <a:prstClr val="black"/>
-              </a:solidFill>
-              <a:latin typeface="Lucida Sans Unicode" charset="0"/>
-              <a:ea typeface="Lucida Sans Unicode" charset="0"/>
-              <a:cs typeface="Lucida Sans Unicode" charset="0"/>
-            </a:endParaRPr>
           </a:p>
         </p:txBody>
       </p:sp>
@@ -5136,14 +5153,6 @@
               </a:rPr>
               <a:t>F()</a:t>
             </a:r>
-            <a:endParaRPr lang="de-DE" dirty="0">
-              <a:solidFill>
-                <a:prstClr val="black"/>
-              </a:solidFill>
-              <a:latin typeface="Lucida Sans Unicode" charset="0"/>
-              <a:ea typeface="Lucida Sans Unicode" charset="0"/>
-              <a:cs typeface="Lucida Sans Unicode" charset="0"/>
-            </a:endParaRPr>
           </a:p>
         </p:txBody>
       </p:sp>
@@ -5198,17 +5207,117 @@
               </a:rPr>
               <a:t>F()</a:t>
             </a:r>
-            <a:endParaRPr lang="de-DE" dirty="0">
-              <a:solidFill>
-                <a:prstClr val="black"/>
-              </a:solidFill>
-              <a:latin typeface="Lucida Sans Unicode" charset="0"/>
-              <a:ea typeface="Lucida Sans Unicode" charset="0"/>
-              <a:cs typeface="Lucida Sans Unicode" charset="0"/>
-            </a:endParaRPr>
-          </a:p>
-        </p:txBody>
-      </p:sp>
+          </a:p>
+        </p:txBody>
+      </p:sp>
+      <p:cxnSp>
+        <p:nvCxnSpPr>
+          <p:cNvPr id="24" name="Gerade Verbindung mit Pfeil 23"/>
+          <p:cNvCxnSpPr/>
+          <p:nvPr/>
+        </p:nvCxnSpPr>
+        <p:spPr>
+          <a:xfrm>
+            <a:off x="2540803" y="1362306"/>
+            <a:ext cx="783771" cy="0"/>
+          </a:xfrm>
+          <a:prstGeom prst="straightConnector1">
+            <a:avLst/>
+          </a:prstGeom>
+          <a:ln w="38100">
+            <a:solidFill>
+              <a:schemeClr val="tx1"/>
+            </a:solidFill>
+            <a:tailEnd type="triangle"/>
+          </a:ln>
+        </p:spPr>
+        <p:style>
+          <a:lnRef idx="1">
+            <a:schemeClr val="accent1"/>
+          </a:lnRef>
+          <a:fillRef idx="0">
+            <a:schemeClr val="accent1"/>
+          </a:fillRef>
+          <a:effectRef idx="0">
+            <a:schemeClr val="accent1"/>
+          </a:effectRef>
+          <a:fontRef idx="minor">
+            <a:schemeClr val="tx1"/>
+          </a:fontRef>
+        </p:style>
+      </p:cxnSp>
+      <p:cxnSp>
+        <p:nvCxnSpPr>
+          <p:cNvPr id="30" name="Gerade Verbindung mit Pfeil 29"/>
+          <p:cNvCxnSpPr/>
+          <p:nvPr/>
+        </p:nvCxnSpPr>
+        <p:spPr>
+          <a:xfrm>
+            <a:off x="2540803" y="1370135"/>
+            <a:ext cx="783771" cy="774371"/>
+          </a:xfrm>
+          <a:prstGeom prst="straightConnector1">
+            <a:avLst/>
+          </a:prstGeom>
+          <a:ln w="38100">
+            <a:solidFill>
+              <a:schemeClr val="tx1"/>
+            </a:solidFill>
+            <a:tailEnd type="triangle"/>
+          </a:ln>
+        </p:spPr>
+        <p:style>
+          <a:lnRef idx="1">
+            <a:schemeClr val="accent1"/>
+          </a:lnRef>
+          <a:fillRef idx="0">
+            <a:schemeClr val="accent1"/>
+          </a:fillRef>
+          <a:effectRef idx="0">
+            <a:schemeClr val="accent1"/>
+          </a:effectRef>
+          <a:fontRef idx="minor">
+            <a:schemeClr val="tx1"/>
+          </a:fontRef>
+        </p:style>
+      </p:cxnSp>
+      <p:cxnSp>
+        <p:nvCxnSpPr>
+          <p:cNvPr id="31" name="Gerade Verbindung mit Pfeil 30"/>
+          <p:cNvCxnSpPr/>
+          <p:nvPr/>
+        </p:nvCxnSpPr>
+        <p:spPr>
+          <a:xfrm flipV="1">
+            <a:off x="2544019" y="595764"/>
+            <a:ext cx="783771" cy="774371"/>
+          </a:xfrm>
+          <a:prstGeom prst="straightConnector1">
+            <a:avLst/>
+          </a:prstGeom>
+          <a:ln w="38100">
+            <a:solidFill>
+              <a:schemeClr val="tx1"/>
+            </a:solidFill>
+            <a:tailEnd type="triangle"/>
+          </a:ln>
+        </p:spPr>
+        <p:style>
+          <a:lnRef idx="1">
+            <a:schemeClr val="accent1"/>
+          </a:lnRef>
+          <a:fillRef idx="0">
+            <a:schemeClr val="accent1"/>
+          </a:fillRef>
+          <a:effectRef idx="0">
+            <a:schemeClr val="accent1"/>
+          </a:effectRef>
+          <a:fontRef idx="minor">
+            <a:schemeClr val="tx1"/>
+          </a:fontRef>
+        </p:style>
+      </p:cxnSp>
     </p:spTree>
     <p:extLst>
       <p:ext uri="{BB962C8B-B14F-4D97-AF65-F5344CB8AC3E}">
